--- a/doc/ppt/CloudDrive_專題報告_v2.0.pptx
+++ b/doc/ppt/CloudDrive_專題報告_v2.0.pptx
@@ -8324,7 +8324,7 @@
                 <a:ea typeface="PingFang TC" pitchFamily="34" charset="-122"/>
                 <a:cs typeface="PingFang TC" pitchFamily="34" charset="-120"/>
               </a:rPr>
-              <a:t>實測結果：規劃可靠度與多輪記憶</a:t>
+              <a:t>實測結果：現行基準與多輪記憶</a:t>
             </a:r>
             <a:endParaRPr lang="en-US" sz="3000" dirty="0"/>
           </a:p>
@@ -8359,6 +8359,390 @@
         <p:spPr>
           <a:xfrm>
             <a:off x="566928" y="1280160"/>
+            <a:ext cx="2647188" cy="1325880"/>
+          </a:xfrm>
+          <a:prstGeom prst="roundRect">
+            <a:avLst>
+              <a:gd name="adj" fmla="val 3448"/>
+            </a:avLst>
+          </a:prstGeom>
+          <a:solidFill>
+            <a:srgbClr val="EFF3F6"/>
+          </a:solidFill>
+          <a:ln w="12700">
+            <a:solidFill>
+              <a:srgbClr val="5E8F72"/>
+            </a:solidFill>
+            <a:prstDash val="solid"/>
+          </a:ln>
+        </p:spPr>
+      </p:sp>
+      <p:sp>
+        <p:nvSpPr>
+          <p:cNvPr id="7" name="Text 5"/>
+          <p:cNvSpPr/>
+          <p:nvPr/>
+        </p:nvSpPr>
+        <p:spPr>
+          <a:xfrm>
+            <a:off x="640080" y="1371600"/>
+            <a:ext cx="2500884" cy="420624"/>
+          </a:xfrm>
+          <a:prstGeom prst="rect">
+            <a:avLst/>
+          </a:prstGeom>
+          <a:noFill/>
+          <a:ln/>
+        </p:spPr>
+        <p:txBody>
+          <a:bodyPr wrap="square" rtlCol="0" anchor="ctr"/>
+          <a:lstStyle/>
+          <a:p>
+            <a:pPr algn="ctr" indent="0" marL="0">
+              <a:buNone/>
+            </a:pPr>
+            <a:r>
+              <a:rPr lang="en-US" sz="2500" b="1" dirty="0">
+                <a:solidFill>
+                  <a:srgbClr val="5E8F72"/>
+                </a:solidFill>
+                <a:latin typeface="Georgia" pitchFamily="34" charset="0"/>
+                <a:ea typeface="Georgia" pitchFamily="34" charset="-122"/>
+                <a:cs typeface="Georgia" pitchFamily="34" charset="-120"/>
+              </a:rPr>
+              <a:t>387 / 420</a:t>
+            </a:r>
+            <a:endParaRPr lang="en-US" sz="2500" dirty="0"/>
+          </a:p>
+        </p:txBody>
+      </p:sp>
+      <p:sp>
+        <p:nvSpPr>
+          <p:cNvPr id="8" name="Text 6"/>
+          <p:cNvSpPr/>
+          <p:nvPr/>
+        </p:nvSpPr>
+        <p:spPr>
+          <a:xfrm>
+            <a:off x="640080" y="1810512"/>
+            <a:ext cx="2500884" cy="704088"/>
+          </a:xfrm>
+          <a:prstGeom prst="rect">
+            <a:avLst/>
+          </a:prstGeom>
+          <a:noFill/>
+          <a:ln/>
+        </p:spPr>
+        <p:txBody>
+          <a:bodyPr wrap="square" rtlCol="0" anchor="t"/>
+          <a:lstStyle/>
+          <a:p>
+            <a:pPr algn="ctr" indent="0" marL="0">
+              <a:lnSpc>
+                <a:spcPct val="114000"/>
+              </a:lnSpc>
+              <a:buNone/>
+            </a:pPr>
+            <a:r>
+              <a:rPr lang="en-US" sz="1500" dirty="0">
+                <a:solidFill>
+                  <a:srgbClr val="5B6470"/>
+                </a:solidFill>
+                <a:latin typeface="PingFang TC" pitchFamily="34" charset="0"/>
+                <a:ea typeface="PingFang TC" pitchFamily="34" charset="-122"/>
+                <a:cs typeface="PingFang TC" pitchFamily="34" charset="-120"/>
+              </a:rPr>
+              <a:t>現行基準通過率</a:t>
+            </a:r>
+            <a:endParaRPr lang="en-US" sz="1500" dirty="0"/>
+          </a:p>
+          <a:p>
+            <a:pPr algn="ctr" indent="0" marL="0">
+              <a:lnSpc>
+                <a:spcPct val="114000"/>
+              </a:lnSpc>
+              <a:buNone/>
+            </a:pPr>
+            <a:r>
+              <a:rPr lang="en-US" sz="1500" dirty="0">
+                <a:solidFill>
+                  <a:srgbClr val="5B6470"/>
+                </a:solidFill>
+                <a:latin typeface="PingFang TC" pitchFamily="34" charset="0"/>
+                <a:ea typeface="PingFang TC" pitchFamily="34" charset="-122"/>
+                <a:cs typeface="PingFang TC" pitchFamily="34" charset="-120"/>
+              </a:rPr>
+              <a:t>gemma4:26b · runs=3</a:t>
+            </a:r>
+            <a:endParaRPr lang="en-US" sz="1500" dirty="0"/>
+          </a:p>
+        </p:txBody>
+      </p:sp>
+      <p:sp>
+        <p:nvSpPr>
+          <p:cNvPr id="9" name="Shape 7"/>
+          <p:cNvSpPr/>
+          <p:nvPr/>
+        </p:nvSpPr>
+        <p:spPr>
+          <a:xfrm>
+            <a:off x="3360420" y="1280160"/>
+            <a:ext cx="2647188" cy="1325880"/>
+          </a:xfrm>
+          <a:prstGeom prst="roundRect">
+            <a:avLst>
+              <a:gd name="adj" fmla="val 3448"/>
+            </a:avLst>
+          </a:prstGeom>
+          <a:solidFill>
+            <a:srgbClr val="EFF3F6"/>
+          </a:solidFill>
+          <a:ln w="12700">
+            <a:solidFill>
+              <a:srgbClr val="B06A66"/>
+            </a:solidFill>
+            <a:prstDash val="solid"/>
+          </a:ln>
+        </p:spPr>
+      </p:sp>
+      <p:sp>
+        <p:nvSpPr>
+          <p:cNvPr id="10" name="Text 8"/>
+          <p:cNvSpPr/>
+          <p:nvPr/>
+        </p:nvSpPr>
+        <p:spPr>
+          <a:xfrm>
+            <a:off x="3433572" y="1371600"/>
+            <a:ext cx="2500884" cy="420624"/>
+          </a:xfrm>
+          <a:prstGeom prst="rect">
+            <a:avLst/>
+          </a:prstGeom>
+          <a:noFill/>
+          <a:ln/>
+        </p:spPr>
+        <p:txBody>
+          <a:bodyPr wrap="square" rtlCol="0" anchor="ctr"/>
+          <a:lstStyle/>
+          <a:p>
+            <a:pPr algn="ctr" indent="0" marL="0">
+              <a:buNone/>
+            </a:pPr>
+            <a:r>
+              <a:rPr lang="en-US" sz="2500" b="1" dirty="0">
+                <a:solidFill>
+                  <a:srgbClr val="B06A66"/>
+                </a:solidFill>
+                <a:latin typeface="Georgia" pitchFamily="34" charset="0"/>
+                <a:ea typeface="Georgia" pitchFamily="34" charset="-122"/>
+                <a:cs typeface="Georgia" pitchFamily="34" charset="-120"/>
+              </a:rPr>
+              <a:t>95 / 120</a:t>
+            </a:r>
+            <a:endParaRPr lang="en-US" sz="2500" dirty="0"/>
+          </a:p>
+        </p:txBody>
+      </p:sp>
+      <p:sp>
+        <p:nvSpPr>
+          <p:cNvPr id="11" name="Text 9"/>
+          <p:cNvSpPr/>
+          <p:nvPr/>
+        </p:nvSpPr>
+        <p:spPr>
+          <a:xfrm>
+            <a:off x="3433572" y="1810512"/>
+            <a:ext cx="2500884" cy="704088"/>
+          </a:xfrm>
+          <a:prstGeom prst="rect">
+            <a:avLst/>
+          </a:prstGeom>
+          <a:noFill/>
+          <a:ln/>
+        </p:spPr>
+        <p:txBody>
+          <a:bodyPr wrap="square" rtlCol="0" anchor="t"/>
+          <a:lstStyle/>
+          <a:p>
+            <a:pPr algn="ctr" indent="0" marL="0">
+              <a:lnSpc>
+                <a:spcPct val="114000"/>
+              </a:lnSpc>
+              <a:buNone/>
+            </a:pPr>
+            <a:r>
+              <a:rPr lang="en-US" sz="1500" dirty="0">
+                <a:solidFill>
+                  <a:srgbClr val="5B6470"/>
+                </a:solidFill>
+                <a:latin typeface="PingFang TC" pitchFamily="34" charset="0"/>
+                <a:ea typeface="PingFang TC" pitchFamily="34" charset="-122"/>
+                <a:cs typeface="PingFang TC" pitchFamily="34" charset="-120"/>
+              </a:rPr>
+              <a:t>EC2 最弱一層</a:t>
+            </a:r>
+            <a:endParaRPr lang="en-US" sz="1500" dirty="0"/>
+          </a:p>
+          <a:p>
+            <a:pPr algn="ctr" indent="0" marL="0">
+              <a:lnSpc>
+                <a:spcPct val="114000"/>
+              </a:lnSpc>
+              <a:buNone/>
+            </a:pPr>
+            <a:r>
+              <a:rPr lang="en-US" sz="1500" dirty="0">
+                <a:solidFill>
+                  <a:srgbClr val="5B6470"/>
+                </a:solidFill>
+                <a:latin typeface="PingFang TC" pitchFamily="34" charset="0"/>
+                <a:ea typeface="PingFang TC" pitchFamily="34" charset="-122"/>
+                <a:cs typeface="PingFang TC" pitchFamily="34" charset="-120"/>
+              </a:rPr>
+              <a:t>寫入意圖仍是瓶頸</a:t>
+            </a:r>
+            <a:endParaRPr lang="en-US" sz="1500" dirty="0"/>
+          </a:p>
+        </p:txBody>
+      </p:sp>
+      <p:sp>
+        <p:nvSpPr>
+          <p:cNvPr id="12" name="Shape 10"/>
+          <p:cNvSpPr/>
+          <p:nvPr/>
+        </p:nvSpPr>
+        <p:spPr>
+          <a:xfrm>
+            <a:off x="6153912" y="1280160"/>
+            <a:ext cx="2647188" cy="1325880"/>
+          </a:xfrm>
+          <a:prstGeom prst="roundRect">
+            <a:avLst>
+              <a:gd name="adj" fmla="val 3448"/>
+            </a:avLst>
+          </a:prstGeom>
+          <a:solidFill>
+            <a:srgbClr val="EFF3F6"/>
+          </a:solidFill>
+          <a:ln w="12700">
+            <a:solidFill>
+              <a:srgbClr val="C9A94E"/>
+            </a:solidFill>
+            <a:prstDash val="solid"/>
+          </a:ln>
+        </p:spPr>
+      </p:sp>
+      <p:sp>
+        <p:nvSpPr>
+          <p:cNvPr id="13" name="Text 11"/>
+          <p:cNvSpPr/>
+          <p:nvPr/>
+        </p:nvSpPr>
+        <p:spPr>
+          <a:xfrm>
+            <a:off x="6227064" y="1371600"/>
+            <a:ext cx="2500884" cy="420624"/>
+          </a:xfrm>
+          <a:prstGeom prst="rect">
+            <a:avLst/>
+          </a:prstGeom>
+          <a:noFill/>
+          <a:ln/>
+        </p:spPr>
+        <p:txBody>
+          <a:bodyPr wrap="square" rtlCol="0" anchor="ctr"/>
+          <a:lstStyle/>
+          <a:p>
+            <a:pPr algn="ctr" indent="0" marL="0">
+              <a:buNone/>
+            </a:pPr>
+            <a:r>
+              <a:rPr lang="en-US" sz="2500" b="1" dirty="0">
+                <a:solidFill>
+                  <a:srgbClr val="C9A94E"/>
+                </a:solidFill>
+                <a:latin typeface="Georgia" pitchFamily="34" charset="0"/>
+                <a:ea typeface="Georgia" pitchFamily="34" charset="-122"/>
+                <a:cs typeface="Georgia" pitchFamily="34" charset="-120"/>
+              </a:rPr>
+              <a:t>45</a:t>
+            </a:r>
+            <a:endParaRPr lang="en-US" sz="2500" dirty="0"/>
+          </a:p>
+        </p:txBody>
+      </p:sp>
+      <p:sp>
+        <p:nvSpPr>
+          <p:cNvPr id="14" name="Text 12"/>
+          <p:cNvSpPr/>
+          <p:nvPr/>
+        </p:nvSpPr>
+        <p:spPr>
+          <a:xfrm>
+            <a:off x="6227064" y="1810512"/>
+            <a:ext cx="2500884" cy="704088"/>
+          </a:xfrm>
+          <a:prstGeom prst="rect">
+            <a:avLst/>
+          </a:prstGeom>
+          <a:noFill/>
+          <a:ln/>
+        </p:spPr>
+        <p:txBody>
+          <a:bodyPr wrap="square" rtlCol="0" anchor="t"/>
+          <a:lstStyle/>
+          <a:p>
+            <a:pPr algn="ctr" indent="0" marL="0">
+              <a:lnSpc>
+                <a:spcPct val="114000"/>
+              </a:lnSpc>
+              <a:buNone/>
+            </a:pPr>
+            <a:r>
+              <a:rPr lang="en-US" sz="1500" dirty="0">
+                <a:solidFill>
+                  <a:srgbClr val="5B6470"/>
+                </a:solidFill>
+                <a:latin typeface="PingFang TC" pitchFamily="34" charset="0"/>
+                <a:ea typeface="PingFang TC" pitchFamily="34" charset="-122"/>
+                <a:cs typeface="PingFang TC" pitchFamily="34" charset="-120"/>
+              </a:rPr>
+              <a:t>不穩定案例</a:t>
+            </a:r>
+            <a:endParaRPr lang="en-US" sz="1500" dirty="0"/>
+          </a:p>
+          <a:p>
+            <a:pPr algn="ctr" indent="0" marL="0">
+              <a:lnSpc>
+                <a:spcPct val="114000"/>
+              </a:lnSpc>
+              <a:buNone/>
+            </a:pPr>
+            <a:r>
+              <a:rPr lang="en-US" sz="1500" dirty="0">
+                <a:solidFill>
+                  <a:srgbClr val="5B6470"/>
+                </a:solidFill>
+                <a:latin typeface="PingFang TC" pitchFamily="34" charset="0"/>
+                <a:ea typeface="PingFang TC" pitchFamily="34" charset="-122"/>
+                <a:cs typeface="PingFang TC" pitchFamily="34" charset="-120"/>
+              </a:rPr>
+              <a:t>三次跑批有對有錯</a:t>
+            </a:r>
+            <a:endParaRPr lang="en-US" sz="1500" dirty="0"/>
+          </a:p>
+        </p:txBody>
+      </p:sp>
+      <p:sp>
+        <p:nvSpPr>
+          <p:cNvPr id="15" name="Shape 13"/>
+          <p:cNvSpPr/>
+          <p:nvPr/>
+        </p:nvSpPr>
+        <p:spPr>
+          <a:xfrm>
+            <a:off x="8947404" y="1280160"/>
             <a:ext cx="2647188" cy="1325880"/>
           </a:xfrm>
           <a:prstGeom prst="roundRect">
@@ -8379,13 +8763,13 @@
       </p:sp>
       <p:sp>
         <p:nvSpPr>
-          <p:cNvPr id="7" name="Text 5"/>
-          <p:cNvSpPr/>
-          <p:nvPr/>
-        </p:nvSpPr>
-        <p:spPr>
-          <a:xfrm>
-            <a:off x="640080" y="1371600"/>
+          <p:cNvPr id="16" name="Text 14"/>
+          <p:cNvSpPr/>
+          <p:nvPr/>
+        </p:nvSpPr>
+        <p:spPr>
+          <a:xfrm>
+            <a:off x="9020556" y="1371600"/>
             <a:ext cx="2500884" cy="420624"/>
           </a:xfrm>
           <a:prstGeom prst="rect">
@@ -8402,7 +8786,7 @@
               <a:buNone/>
             </a:pPr>
             <a:r>
-              <a:rPr lang="en-US" sz="2200" b="1" dirty="0">
+              <a:rPr lang="en-US" sz="2000" b="1" dirty="0">
                 <a:solidFill>
                   <a:srgbClr val="2F6F8F"/>
                 </a:solidFill>
@@ -8412,19 +8796,19 @@
               </a:rPr>
               <a:t>92.4s → 8.6s</a:t>
             </a:r>
-            <a:endParaRPr lang="en-US" sz="2200" dirty="0"/>
-          </a:p>
-        </p:txBody>
-      </p:sp>
-      <p:sp>
-        <p:nvSpPr>
-          <p:cNvPr id="8" name="Text 6"/>
-          <p:cNvSpPr/>
-          <p:nvPr/>
-        </p:nvSpPr>
-        <p:spPr>
-          <a:xfrm>
-            <a:off x="640080" y="1810512"/>
+            <a:endParaRPr lang="en-US" sz="2000" dirty="0"/>
+          </a:p>
+        </p:txBody>
+      </p:sp>
+      <p:sp>
+        <p:nvSpPr>
+          <p:cNvPr id="17" name="Text 15"/>
+          <p:cNvSpPr/>
+          <p:nvPr/>
+        </p:nvSpPr>
+        <p:spPr>
+          <a:xfrm>
+            <a:off x="9020556" y="1810512"/>
             <a:ext cx="2500884" cy="704088"/>
           </a:xfrm>
           <a:prstGeom prst="rect">
@@ -8473,390 +8857,6 @@
                 <a:cs typeface="PingFang TC" pitchFamily="34" charset="-120"/>
               </a:rPr>
               <a:t>（關閉 thinking 後）</a:t>
-            </a:r>
-            <a:endParaRPr lang="en-US" sz="1500" dirty="0"/>
-          </a:p>
-        </p:txBody>
-      </p:sp>
-      <p:sp>
-        <p:nvSpPr>
-          <p:cNvPr id="9" name="Shape 7"/>
-          <p:cNvSpPr/>
-          <p:nvPr/>
-        </p:nvSpPr>
-        <p:spPr>
-          <a:xfrm>
-            <a:off x="3360420" y="1280160"/>
-            <a:ext cx="2647188" cy="1325880"/>
-          </a:xfrm>
-          <a:prstGeom prst="roundRect">
-            <a:avLst>
-              <a:gd name="adj" fmla="val 3448"/>
-            </a:avLst>
-          </a:prstGeom>
-          <a:solidFill>
-            <a:srgbClr val="EFF3F6"/>
-          </a:solidFill>
-          <a:ln w="12700">
-            <a:solidFill>
-              <a:srgbClr val="5E8F72"/>
-            </a:solidFill>
-            <a:prstDash val="solid"/>
-          </a:ln>
-        </p:spPr>
-      </p:sp>
-      <p:sp>
-        <p:nvSpPr>
-          <p:cNvPr id="10" name="Text 8"/>
-          <p:cNvSpPr/>
-          <p:nvPr/>
-        </p:nvSpPr>
-        <p:spPr>
-          <a:xfrm>
-            <a:off x="3433572" y="1371600"/>
-            <a:ext cx="2500884" cy="420624"/>
-          </a:xfrm>
-          <a:prstGeom prst="rect">
-            <a:avLst/>
-          </a:prstGeom>
-          <a:noFill/>
-          <a:ln/>
-        </p:spPr>
-        <p:txBody>
-          <a:bodyPr wrap="square" rtlCol="0" anchor="ctr"/>
-          <a:lstStyle/>
-          <a:p>
-            <a:pPr algn="ctr" indent="0" marL="0">
-              <a:buNone/>
-            </a:pPr>
-            <a:r>
-              <a:rPr lang="en-US" sz="2500" b="1" dirty="0">
-                <a:solidFill>
-                  <a:srgbClr val="5E8F72"/>
-                </a:solidFill>
-                <a:latin typeface="Georgia" pitchFamily="34" charset="0"/>
-                <a:ea typeface="Georgia" pitchFamily="34" charset="-122"/>
-                <a:cs typeface="Georgia" pitchFamily="34" charset="-120"/>
-              </a:rPr>
-              <a:t>400 × 3</a:t>
-            </a:r>
-            <a:endParaRPr lang="en-US" sz="2500" dirty="0"/>
-          </a:p>
-        </p:txBody>
-      </p:sp>
-      <p:sp>
-        <p:nvSpPr>
-          <p:cNvPr id="11" name="Text 9"/>
-          <p:cNvSpPr/>
-          <p:nvPr/>
-        </p:nvSpPr>
-        <p:spPr>
-          <a:xfrm>
-            <a:off x="3433572" y="1810512"/>
-            <a:ext cx="2500884" cy="704088"/>
-          </a:xfrm>
-          <a:prstGeom prst="rect">
-            <a:avLst/>
-          </a:prstGeom>
-          <a:noFill/>
-          <a:ln/>
-        </p:spPr>
-        <p:txBody>
-          <a:bodyPr wrap="square" rtlCol="0" anchor="t"/>
-          <a:lstStyle/>
-          <a:p>
-            <a:pPr algn="ctr" indent="0" marL="0">
-              <a:lnSpc>
-                <a:spcPct val="114000"/>
-              </a:lnSpc>
-              <a:buNone/>
-            </a:pPr>
-            <a:r>
-              <a:rPr lang="en-US" sz="1500" dirty="0">
-                <a:solidFill>
-                  <a:srgbClr val="5B6470"/>
-                </a:solidFill>
-                <a:latin typeface="PingFang TC" pitchFamily="34" charset="0"/>
-                <a:ea typeface="PingFang TC" pitchFamily="34" charset="-122"/>
-                <a:cs typeface="PingFang TC" pitchFamily="34" charset="-120"/>
-              </a:rPr>
-              <a:t>E9 全量實測</a:t>
-            </a:r>
-            <a:endParaRPr lang="en-US" sz="1500" dirty="0"/>
-          </a:p>
-          <a:p>
-            <a:pPr algn="ctr" indent="0" marL="0">
-              <a:lnSpc>
-                <a:spcPct val="114000"/>
-              </a:lnSpc>
-              <a:buNone/>
-            </a:pPr>
-            <a:r>
-              <a:rPr lang="en-US" sz="1500" dirty="0">
-                <a:solidFill>
-                  <a:srgbClr val="5B6470"/>
-                </a:solidFill>
-                <a:latin typeface="PingFang TC" pitchFamily="34" charset="0"/>
-                <a:ea typeface="PingFang TC" pitchFamily="34" charset="-122"/>
-                <a:cs typeface="PingFang TC" pitchFamily="34" charset="-120"/>
-              </a:rPr>
-              <a:t>逐 run 全過</a:t>
-            </a:r>
-            <a:endParaRPr lang="en-US" sz="1500" dirty="0"/>
-          </a:p>
-        </p:txBody>
-      </p:sp>
-      <p:sp>
-        <p:nvSpPr>
-          <p:cNvPr id="12" name="Shape 10"/>
-          <p:cNvSpPr/>
-          <p:nvPr/>
-        </p:nvSpPr>
-        <p:spPr>
-          <a:xfrm>
-            <a:off x="6153912" y="1280160"/>
-            <a:ext cx="2647188" cy="1325880"/>
-          </a:xfrm>
-          <a:prstGeom prst="roundRect">
-            <a:avLst>
-              <a:gd name="adj" fmla="val 3448"/>
-            </a:avLst>
-          </a:prstGeom>
-          <a:solidFill>
-            <a:srgbClr val="EFF3F6"/>
-          </a:solidFill>
-          <a:ln w="12700">
-            <a:solidFill>
-              <a:srgbClr val="7E6DA8"/>
-            </a:solidFill>
-            <a:prstDash val="solid"/>
-          </a:ln>
-        </p:spPr>
-      </p:sp>
-      <p:sp>
-        <p:nvSpPr>
-          <p:cNvPr id="13" name="Text 11"/>
-          <p:cNvSpPr/>
-          <p:nvPr/>
-        </p:nvSpPr>
-        <p:spPr>
-          <a:xfrm>
-            <a:off x="6227064" y="1371600"/>
-            <a:ext cx="2500884" cy="420624"/>
-          </a:xfrm>
-          <a:prstGeom prst="rect">
-            <a:avLst/>
-          </a:prstGeom>
-          <a:noFill/>
-          <a:ln/>
-        </p:spPr>
-        <p:txBody>
-          <a:bodyPr wrap="square" rtlCol="0" anchor="ctr"/>
-          <a:lstStyle/>
-          <a:p>
-            <a:pPr algn="ctr" indent="0" marL="0">
-              <a:buNone/>
-            </a:pPr>
-            <a:r>
-              <a:rPr lang="en-US" sz="2500" b="1" dirty="0">
-                <a:solidFill>
-                  <a:srgbClr val="7E6DA8"/>
-                </a:solidFill>
-                <a:latin typeface="Georgia" pitchFamily="34" charset="0"/>
-                <a:ea typeface="Georgia" pitchFamily="34" charset="-122"/>
-                <a:cs typeface="Georgia" pitchFamily="34" charset="-120"/>
-              </a:rPr>
-              <a:t>15 / 15</a:t>
-            </a:r>
-            <a:endParaRPr lang="en-US" sz="2500" dirty="0"/>
-          </a:p>
-        </p:txBody>
-      </p:sp>
-      <p:sp>
-        <p:nvSpPr>
-          <p:cNvPr id="14" name="Text 12"/>
-          <p:cNvSpPr/>
-          <p:nvPr/>
-        </p:nvSpPr>
-        <p:spPr>
-          <a:xfrm>
-            <a:off x="6227064" y="1810512"/>
-            <a:ext cx="2500884" cy="704088"/>
-          </a:xfrm>
-          <a:prstGeom prst="rect">
-            <a:avLst/>
-          </a:prstGeom>
-          <a:noFill/>
-          <a:ln/>
-        </p:spPr>
-        <p:txBody>
-          <a:bodyPr wrap="square" rtlCol="0" anchor="t"/>
-          <a:lstStyle/>
-          <a:p>
-            <a:pPr algn="ctr" indent="0" marL="0">
-              <a:lnSpc>
-                <a:spcPct val="114000"/>
-              </a:lnSpc>
-              <a:buNone/>
-            </a:pPr>
-            <a:r>
-              <a:rPr lang="en-US" sz="1500" dirty="0">
-                <a:solidFill>
-                  <a:srgbClr val="5B6470"/>
-                </a:solidFill>
-                <a:latin typeface="PingFang TC" pitchFamily="34" charset="0"/>
-                <a:ea typeface="PingFang TC" pitchFamily="34" charset="-122"/>
-                <a:cs typeface="PingFang TC" pitchFamily="34" charset="-120"/>
-              </a:rPr>
-              <a:t>多輪記憶</a:t>
-            </a:r>
-            <a:endParaRPr lang="en-US" sz="1500" dirty="0"/>
-          </a:p>
-          <a:p>
-            <a:pPr algn="ctr" indent="0" marL="0">
-              <a:lnSpc>
-                <a:spcPct val="114000"/>
-              </a:lnSpc>
-              <a:buNone/>
-            </a:pPr>
-            <a:r>
-              <a:rPr lang="en-US" sz="1500" dirty="0">
-                <a:solidFill>
-                  <a:srgbClr val="5B6470"/>
-                </a:solidFill>
-                <a:latin typeface="PingFang TC" pitchFamily="34" charset="0"/>
-                <a:ea typeface="PingFang TC" pitchFamily="34" charset="-122"/>
-                <a:cs typeface="PingFang TC" pitchFamily="34" charset="-120"/>
-              </a:rPr>
-              <a:t>三案例綜合通過</a:t>
-            </a:r>
-            <a:endParaRPr lang="en-US" sz="1500" dirty="0"/>
-          </a:p>
-        </p:txBody>
-      </p:sp>
-      <p:sp>
-        <p:nvSpPr>
-          <p:cNvPr id="15" name="Shape 13"/>
-          <p:cNvSpPr/>
-          <p:nvPr/>
-        </p:nvSpPr>
-        <p:spPr>
-          <a:xfrm>
-            <a:off x="8947404" y="1280160"/>
-            <a:ext cx="2647188" cy="1325880"/>
-          </a:xfrm>
-          <a:prstGeom prst="roundRect">
-            <a:avLst>
-              <a:gd name="adj" fmla="val 3448"/>
-            </a:avLst>
-          </a:prstGeom>
-          <a:solidFill>
-            <a:srgbClr val="EFF3F6"/>
-          </a:solidFill>
-          <a:ln w="12700">
-            <a:solidFill>
-              <a:srgbClr val="C9A94E"/>
-            </a:solidFill>
-            <a:prstDash val="solid"/>
-          </a:ln>
-        </p:spPr>
-      </p:sp>
-      <p:sp>
-        <p:nvSpPr>
-          <p:cNvPr id="16" name="Text 14"/>
-          <p:cNvSpPr/>
-          <p:nvPr/>
-        </p:nvSpPr>
-        <p:spPr>
-          <a:xfrm>
-            <a:off x="9020556" y="1371600"/>
-            <a:ext cx="2500884" cy="420624"/>
-          </a:xfrm>
-          <a:prstGeom prst="rect">
-            <a:avLst/>
-          </a:prstGeom>
-          <a:noFill/>
-          <a:ln/>
-        </p:spPr>
-        <p:txBody>
-          <a:bodyPr wrap="square" rtlCol="0" anchor="ctr"/>
-          <a:lstStyle/>
-          <a:p>
-            <a:pPr algn="ctr" indent="0" marL="0">
-              <a:buNone/>
-            </a:pPr>
-            <a:r>
-              <a:rPr lang="en-US" sz="2500" b="1" dirty="0">
-                <a:solidFill>
-                  <a:srgbClr val="C9A94E"/>
-                </a:solidFill>
-                <a:latin typeface="Georgia" pitchFamily="34" charset="0"/>
-                <a:ea typeface="Georgia" pitchFamily="34" charset="-122"/>
-                <a:cs typeface="Georgia" pitchFamily="34" charset="-120"/>
-              </a:rPr>
-              <a:t>0</a:t>
-            </a:r>
-            <a:endParaRPr lang="en-US" sz="2500" dirty="0"/>
-          </a:p>
-        </p:txBody>
-      </p:sp>
-      <p:sp>
-        <p:nvSpPr>
-          <p:cNvPr id="17" name="Text 15"/>
-          <p:cNvSpPr/>
-          <p:nvPr/>
-        </p:nvSpPr>
-        <p:spPr>
-          <a:xfrm>
-            <a:off x="9020556" y="1810512"/>
-            <a:ext cx="2500884" cy="704088"/>
-          </a:xfrm>
-          <a:prstGeom prst="rect">
-            <a:avLst/>
-          </a:prstGeom>
-          <a:noFill/>
-          <a:ln/>
-        </p:spPr>
-        <p:txBody>
-          <a:bodyPr wrap="square" rtlCol="0" anchor="t"/>
-          <a:lstStyle/>
-          <a:p>
-            <a:pPr algn="ctr" indent="0" marL="0">
-              <a:lnSpc>
-                <a:spcPct val="114000"/>
-              </a:lnSpc>
-              <a:buNone/>
-            </a:pPr>
-            <a:r>
-              <a:rPr lang="en-US" sz="1500" dirty="0">
-                <a:solidFill>
-                  <a:srgbClr val="5B6470"/>
-                </a:solidFill>
-                <a:latin typeface="PingFang TC" pitchFamily="34" charset="0"/>
-                <a:ea typeface="PingFang TC" pitchFamily="34" charset="-122"/>
-                <a:cs typeface="PingFang TC" pitchFamily="34" charset="-120"/>
-              </a:rPr>
-              <a:t>修復後</a:t>
-            </a:r>
-            <a:endParaRPr lang="en-US" sz="1500" dirty="0"/>
-          </a:p>
-          <a:p>
-            <a:pPr algn="ctr" indent="0" marL="0">
-              <a:lnSpc>
-                <a:spcPct val="114000"/>
-              </a:lnSpc>
-              <a:buNone/>
-            </a:pPr>
-            <a:r>
-              <a:rPr lang="en-US" sz="1500" dirty="0">
-                <a:solidFill>
-                  <a:srgbClr val="5B6470"/>
-                </a:solidFill>
-                <a:latin typeface="PingFang TC" pitchFamily="34" charset="0"/>
-                <a:ea typeface="PingFang TC" pitchFamily="34" charset="-122"/>
-                <a:cs typeface="PingFang TC" pitchFamily="34" charset="-120"/>
-              </a:rPr>
-              <a:t>重複生成樣本數</a:t>
             </a:r>
             <a:endParaRPr lang="en-US" sz="1500" dirty="0"/>
           </a:p>
@@ -9764,8 +9764,8 @@
         </p:nvSpPr>
         <p:spPr>
           <a:xfrm>
-            <a:off x="566928" y="4956048"/>
-            <a:ext cx="11027664" cy="548640"/>
+            <a:off x="566928" y="4974336"/>
+            <a:ext cx="11027664" cy="384048"/>
           </a:xfrm>
           <a:prstGeom prst="rect">
             <a:avLst/>
@@ -9792,7 +9792,7 @@
                 <a:ea typeface="PingFang TC" pitchFamily="34" charset="-122"/>
                 <a:cs typeface="PingFang TC" pitchFamily="34" charset="-120"/>
               </a:rPr>
-              <a:t>早期系統雖把對話寫入資料庫，但規劃器只收到當前訊息，導致多輪指涉失效。修正：載入最近 N 則歷史給規劃器、以助理文字承載工具執行結果、確認執行後把結果摘要寫回對話。</a:t>
+              <a:t>「嚴格回想」案例的必要性：間接案例只證明模型用到了歷史中的某個 item_id，無法證明它真的記得內容——嚴格回想才揭露了記憶保真問題。</a:t>
             </a:r>
             <a:endParaRPr lang="en-US" sz="1500" dirty="0"/>
           </a:p>
@@ -9861,7 +9861,7 @@
                 <a:ea typeface="PingFang TC" pitchFamily="34" charset="-122"/>
                 <a:cs typeface="PingFang TC" pitchFamily="34" charset="-120"/>
               </a:rPr>
-              <a:t>為什麼要有「嚴格回想」案例：間接案例只證明模型用到了歷史中的某個 item_id，無法證明它真的記得內容——嚴格回想才揭露了記憶保真問題。</a:t>
+              <a:t>基準取捨：2026-07-30 判分語意變更後舊通過率一律作廢，本頁採重建後的 387/420。另一份「400×3 逐 run 全過」的數據在未合併分支 eval/e9-objective-metrics，判分語意較寬，故不採用。</a:t>
             </a:r>
             <a:endParaRPr lang="en-US" sz="1500" dirty="0"/>
           </a:p>
@@ -12981,7 +12981,7 @@
                 <a:ea typeface="Menlo" pitchFamily="34" charset="-122"/>
                 <a:cs typeface="Menlo" pitchFamily="34" charset="-120"/>
               </a:rPr>
-              <a:t>00:33:45  INFO  POST /v1/chat/completions  200</a:t>
+              <a:t>10:33:45  INFO  POST /v1/chat/completions  200</a:t>
             </a:r>
             <a:endParaRPr lang="en-US" sz="1400" dirty="0"/>
           </a:p>
@@ -13020,7 +13020,7 @@
                 <a:ea typeface="Menlo" pitchFamily="34" charset="-122"/>
                 <a:cs typeface="Menlo" pitchFamily="34" charset="-120"/>
               </a:rPr>
-              <a:t>00:45:55  INFO  POST /v1/chat/completions  200</a:t>
+              <a:t>10:45:55  INFO  POST /v1/chat/completions  200</a:t>
             </a:r>
             <a:endParaRPr lang="en-US" sz="1400" dirty="0"/>
           </a:p>
@@ -16861,7 +16861,7 @@
                 <a:ea typeface="Georgia" pitchFamily="34" charset="-122"/>
                 <a:cs typeface="Georgia" pitchFamily="34" charset="-120"/>
               </a:rPr>
-              <a:t>32 / 33</a:t>
+              <a:t>33 / 33</a:t>
             </a:r>
             <a:endParaRPr lang="en-US" sz="2500" dirty="0"/>
           </a:p>
@@ -16903,7 +16903,7 @@
                 <a:ea typeface="PingFang TC" pitchFamily="34" charset="-122"/>
                 <a:cs typeface="PingFang TC" pitchFamily="34" charset="-120"/>
               </a:rPr>
-              <a:t>總計</a:t>
+              <a:t>模組總計</a:t>
             </a:r>
             <a:endParaRPr lang="en-US" sz="1500" dirty="0"/>
           </a:p>
@@ -16923,7 +16923,7 @@
                 <a:ea typeface="PingFang TC" pitchFamily="34" charset="-122"/>
                 <a:cs typeface="PingFang TC" pitchFamily="34" charset="-120"/>
               </a:rPr>
-              <a:t>外部模型尚有部分待補</a:t>
+              <a:t>對齊 progress.md</a:t>
             </a:r>
             <a:endParaRPr lang="en-US" sz="1500" dirty="0"/>
           </a:p>
@@ -22500,7 +22500,7 @@
                 <a:ea typeface="Georgia" pitchFamily="34" charset="-122"/>
                 <a:cs typeface="Georgia" pitchFamily="34" charset="-120"/>
               </a:rPr>
-              <a:t>618 + 40</a:t>
+              <a:t>1,389</a:t>
             </a:r>
             <a:endParaRPr lang="en-US" sz="2500" dirty="0"/>
           </a:p>
@@ -22542,7 +22542,7 @@
                 <a:ea typeface="PingFang TC" pitchFamily="34" charset="-122"/>
                 <a:cs typeface="PingFang TC" pitchFamily="34" charset="-120"/>
               </a:rPr>
-              <a:t>單元測試 + 整合測試</a:t>
+              <a:t>測試全綠</a:t>
             </a:r>
             <a:endParaRPr lang="en-US" sz="1500" dirty="0"/>
           </a:p>
@@ -22562,7 +22562,7 @@
                 <a:ea typeface="PingFang TC" pitchFamily="34" charset="-122"/>
                 <a:cs typeface="PingFang TC" pitchFamily="34" charset="-120"/>
               </a:rPr>
-              <a:t>全綠，無隱藏 skip／xfail</a:t>
+              <a:t>後端 955+73 · 前端 361</a:t>
             </a:r>
             <a:endParaRPr lang="en-US" sz="1500" dirty="0"/>
           </a:p>
@@ -24103,7 +24103,7 @@
                 <a:ea typeface="Georgia" pitchFamily="34" charset="-122"/>
                 <a:cs typeface="Georgia" pitchFamily="34" charset="-120"/>
               </a:rPr>
-              <a:t>W16–18</a:t>
+              <a:t>W15–18</a:t>
             </a:r>
             <a:endParaRPr lang="en-US" sz="1500" dirty="0"/>
           </a:p>
@@ -24142,7 +24142,7 @@
                 <a:ea typeface="Georgia" pitchFamily="34" charset="-122"/>
                 <a:cs typeface="Georgia" pitchFamily="34" charset="-120"/>
               </a:rPr>
-              <a:t>7/6 – 7/26</a:t>
+              <a:t>6/29 – 7/26</a:t>
             </a:r>
             <a:endParaRPr lang="en-US" sz="1500" dirty="0"/>
           </a:p>
@@ -24184,7 +24184,7 @@
                 <a:ea typeface="PingFang TC" pitchFamily="34" charset="-122"/>
                 <a:cs typeface="PingFang TC" pitchFamily="34" charset="-120"/>
               </a:rPr>
-              <a:t>detailed-design 拆模組、需求↔設計對齊；分片續傳上傳、公開分享連結、CD 端加入 Cloudflare Tunnel；W18 單週 66 commits + 簡報製作</a:t>
+              <a:t>harness 歸類文件與 CLAUDE.md 規則強化；detailed-design 拆模組、需求↔設計對齊；分片續傳、公開分享連結、CD 加 Tunnel；W18 單週 66 commits</a:t>
             </a:r>
             <a:endParaRPr lang="en-US" sz="1500" dirty="0"/>
           </a:p>
@@ -24250,7 +24250,7 @@
                 <a:ea typeface="Georgia" pitchFamily="34" charset="-122"/>
                 <a:cs typeface="Georgia" pitchFamily="34" charset="-120"/>
               </a:rPr>
-              <a:t>223</a:t>
+              <a:t>224</a:t>
             </a:r>
             <a:endParaRPr lang="en-US" sz="2500" dirty="0"/>
           </a:p>
